--- a/2.08ForLoops/ForLoops.pptx
+++ b/2.08ForLoops/ForLoops.pptx
@@ -9301,7 +9301,7 @@
         <p:spPr>
           <a:xfrm>
             <a:off x="717062" y="3854205"/>
-            <a:ext cx="4152600" cy="599027"/>
+            <a:ext cx="4511546" cy="599027"/>
           </a:xfrm>
           <a:prstGeom prst="rect">
             <a:avLst/>
@@ -9313,20 +9313,10 @@
           </a:bodyPr>
           <a:lstStyle/>
           <a:p>
-            <a:pPr marL="0" lvl="0" indent="0" algn="l" rtl="0">
-              <a:spcBef>
-                <a:spcPts val="0"/>
-              </a:spcBef>
-              <a:spcAft>
-                <a:spcPts val="0"/>
-              </a:spcAft>
-              <a:buNone/>
-            </a:pPr>
-            <a:r>
-              <a:rPr lang="en" sz="2400" dirty="0"/>
-              <a:t>Hy-Tech Club: Web 102</a:t>
-            </a:r>
-            <a:endParaRPr sz="2400" dirty="0"/>
+            <a:r>
+              <a:rPr lang="en-US" sz="2400" dirty="0"/>
+              <a:t>HTO: Website Development</a:t>
+            </a:r>
           </a:p>
         </p:txBody>
       </p:sp>
